--- a/catalog/samples/issue_tree.pptx
+++ b/catalog/samples/issue_tree.pptx
@@ -1172,7 +1172,7 @@
           </a:p>
           <a:p>
             <a:r>
-              <a:t>  "template_sha256": "1bb2f99e60f862503f6a3f2fe4850e0beb344bb25cfdf08b0380a4399324bdb8"</a:t>
+              <a:t>  "template_sha256": "97046c494b9631f2fec2d3f8ddcb4f6125c43aa79822ed2b0f830c1de9839662"</a:t>
             </a:r>
           </a:p>
           <a:p>
